--- a/index/designs/y8-l7/l3-duration/l3-duration.pptx
+++ b/index/designs/y8-l7/l3-duration/l3-duration.pptx
@@ -2561,9 +2561,6 @@
               </a:rPr>
               <a:t>今天我们学习</a:t>
             </a:r>
-            <a:pPr algn="ctr" indent="0" marL="0">
-              <a:buNone/>
-            </a:pPr>
             <a:r>
               <a:rPr lang="en-US" sz="1300" dirty="0">
                 <a:solidFill>
@@ -4159,6 +4156,53 @@
               </a:rPr>
               <a:t>Students have a 3×3 card with </a:t>
             </a:r>
+            <a:r>
+              <a:rPr lang="en-US" sz="1000" b="1" dirty="0">
+                <a:solidFill>
+                  <a:srgbClr val="1E2A38"/>
+                </a:solidFill>
+                <a:latin typeface="Noto Sans SC" pitchFamily="34" charset="0"/>
+                <a:ea typeface="Noto Sans SC" pitchFamily="34" charset="-122"/>
+                <a:cs typeface="Noto Sans SC" pitchFamily="34" charset="-120"/>
+              </a:rPr>
+              <a:t>9 English duration phrases</a:t>
+            </a:r>
+            <a:r>
+              <a:rPr lang="en-US" sz="1000" dirty="0">
+                <a:solidFill>
+                  <a:srgbClr val="5B6677"/>
+                </a:solidFill>
+                <a:latin typeface="Noto Sans SC" pitchFamily="34" charset="0"/>
+                <a:ea typeface="Noto Sans SC" pitchFamily="34" charset="-122"/>
+                <a:cs typeface="Noto Sans SC" pitchFamily="34" charset="-120"/>
+              </a:rPr>
+              <a:t> in random squares.</a:t>
+            </a:r>
+            <a:endParaRPr lang="en-US" sz="1000" dirty="0"/>
+          </a:p>
+        </p:txBody>
+      </p:sp>
+      <p:sp>
+        <p:nvSpPr>
+          <p:cNvPr id="43" name="Text 41"/>
+          <p:cNvSpPr/>
+          <p:nvPr/>
+        </p:nvSpPr>
+        <p:spPr>
+          <a:xfrm>
+            <a:off x="4384328" y="2199829"/>
+            <a:ext cx="165164" cy="177701"/>
+          </a:xfrm>
+          <a:prstGeom prst="rect">
+            <a:avLst/>
+          </a:prstGeom>
+          <a:noFill/>
+          <a:ln/>
+        </p:spPr>
+        <p:txBody>
+          <a:bodyPr wrap="square" lIns="0" tIns="0" rIns="0" bIns="0" rtlCol="0" anchor="t"/>
+          <a:lstStyle/>
+          <a:p>
             <a:pPr algn="l" indent="0" marL="0">
               <a:lnSpc>
                 <a:spcPts val="1400"/>
@@ -4166,16 +4210,41 @@
               <a:buNone/>
             </a:pPr>
             <a:r>
-              <a:rPr lang="en-US" sz="1000" b="1" dirty="0">
-                <a:solidFill>
-                  <a:srgbClr val="1E2A38"/>
-                </a:solidFill>
-                <a:latin typeface="Noto Sans SC" pitchFamily="34" charset="0"/>
-                <a:ea typeface="Noto Sans SC" pitchFamily="34" charset="-122"/>
-                <a:cs typeface="Noto Sans SC" pitchFamily="34" charset="-120"/>
-              </a:rPr>
-              <a:t>9 English duration phrases</a:t>
-            </a:r>
+              <a:rPr lang="en-US" sz="1000" dirty="0">
+                <a:solidFill>
+                  <a:srgbClr val="5B6677"/>
+                </a:solidFill>
+                <a:latin typeface="Noto Sans SC" pitchFamily="34" charset="0"/>
+                <a:ea typeface="Noto Sans SC" pitchFamily="34" charset="-122"/>
+                <a:cs typeface="Noto Sans SC" pitchFamily="34" charset="-120"/>
+              </a:rPr>
+              <a:t>2️⃣</a:t>
+            </a:r>
+            <a:endParaRPr lang="en-US" sz="1000" dirty="0"/>
+          </a:p>
+        </p:txBody>
+      </p:sp>
+      <p:sp>
+        <p:nvSpPr>
+          <p:cNvPr id="44" name="Text 42"/>
+          <p:cNvSpPr/>
+          <p:nvPr/>
+        </p:nvSpPr>
+        <p:spPr>
+          <a:xfrm>
+            <a:off x="4660553" y="2199829"/>
+            <a:ext cx="6726162" cy="177701"/>
+          </a:xfrm>
+          <a:prstGeom prst="rect">
+            <a:avLst/>
+          </a:prstGeom>
+          <a:noFill/>
+          <a:ln/>
+        </p:spPr>
+        <p:txBody>
+          <a:bodyPr wrap="square" lIns="0" tIns="0" rIns="0" bIns="0" rtlCol="0" anchor="t"/>
+          <a:lstStyle/>
+          <a:p>
             <a:pPr algn="l" indent="0" marL="0">
               <a:lnSpc>
                 <a:spcPts val="1400"/>
@@ -4191,7 +4260,29 @@
                 <a:ea typeface="Noto Sans SC" pitchFamily="34" charset="-122"/>
                 <a:cs typeface="Noto Sans SC" pitchFamily="34" charset="-120"/>
               </a:rPr>
-              <a:t> in random squares.</a:t>
+              <a:t>Teacher calls out duration phrases </a:t>
+            </a:r>
+            <a:r>
+              <a:rPr lang="en-US" sz="1000" b="1" dirty="0">
+                <a:solidFill>
+                  <a:srgbClr val="1E2A38"/>
+                </a:solidFill>
+                <a:latin typeface="Noto Sans SC" pitchFamily="34" charset="0"/>
+                <a:ea typeface="Noto Sans SC" pitchFamily="34" charset="-122"/>
+                <a:cs typeface="Noto Sans SC" pitchFamily="34" charset="-120"/>
+              </a:rPr>
+              <a:t>in Chinese</a:t>
+            </a:r>
+            <a:r>
+              <a:rPr lang="en-US" sz="1000" dirty="0">
+                <a:solidFill>
+                  <a:srgbClr val="5B6677"/>
+                </a:solidFill>
+                <a:latin typeface="Noto Sans SC" pitchFamily="34" charset="0"/>
+                <a:ea typeface="Noto Sans SC" pitchFamily="34" charset="-122"/>
+                <a:cs typeface="Noto Sans SC" pitchFamily="34" charset="-120"/>
+              </a:rPr>
+              <a:t> (e.g. 两个小时). Students find &amp; mark the English equivalent.</a:t>
             </a:r>
             <a:endParaRPr lang="en-US" sz="1000" dirty="0"/>
           </a:p>
@@ -4199,13 +4290,13 @@
       </p:sp>
       <p:sp>
         <p:nvSpPr>
-          <p:cNvPr id="43" name="Text 41"/>
-          <p:cNvSpPr/>
-          <p:nvPr/>
-        </p:nvSpPr>
-        <p:spPr>
-          <a:xfrm>
-            <a:off x="4384328" y="2199829"/>
+          <p:cNvPr id="45" name="Text 43"/>
+          <p:cNvSpPr/>
+          <p:nvPr/>
+        </p:nvSpPr>
+        <p:spPr>
+          <a:xfrm>
+            <a:off x="4384328" y="2466380"/>
             <a:ext cx="165164" cy="177701"/>
           </a:xfrm>
           <a:prstGeom prst="rect">
@@ -4233,7 +4324,7 @@
                 <a:ea typeface="Noto Sans SC" pitchFamily="34" charset="-122"/>
                 <a:cs typeface="Noto Sans SC" pitchFamily="34" charset="-120"/>
               </a:rPr>
-              <a:t>2️⃣</a:t>
+              <a:t>3️⃣</a:t>
             </a:r>
             <a:endParaRPr lang="en-US" sz="1000" dirty="0"/>
           </a:p>
@@ -4241,14 +4332,14 @@
       </p:sp>
       <p:sp>
         <p:nvSpPr>
-          <p:cNvPr id="44" name="Text 42"/>
-          <p:cNvSpPr/>
-          <p:nvPr/>
-        </p:nvSpPr>
-        <p:spPr>
-          <a:xfrm>
-            <a:off x="4660553" y="2199829"/>
-            <a:ext cx="6726162" cy="177701"/>
+          <p:cNvPr id="46" name="Text 44"/>
+          <p:cNvSpPr/>
+          <p:nvPr/>
+        </p:nvSpPr>
+        <p:spPr>
+          <a:xfrm>
+            <a:off x="4660553" y="2466380"/>
+            <a:ext cx="5946797" cy="177701"/>
           </a:xfrm>
           <a:prstGeom prst="rect">
             <a:avLst/>
@@ -4267,6 +4358,17 @@
               <a:buNone/>
             </a:pPr>
             <a:r>
+              <a:rPr lang="en-US" sz="1000" b="1" dirty="0">
+                <a:solidFill>
+                  <a:srgbClr val="1E2A38"/>
+                </a:solidFill>
+                <a:latin typeface="Noto Sans SC" pitchFamily="34" charset="0"/>
+                <a:ea typeface="Noto Sans SC" pitchFamily="34" charset="-122"/>
+                <a:cs typeface="Noto Sans SC" pitchFamily="34" charset="-120"/>
+              </a:rPr>
+              <a:t>Three in a row</a:t>
+            </a:r>
+            <a:r>
               <a:rPr lang="en-US" sz="1000" dirty="0">
                 <a:solidFill>
                   <a:srgbClr val="5B6677"/>
@@ -4275,8 +4377,33 @@
                 <a:ea typeface="Noto Sans SC" pitchFamily="34" charset="-122"/>
                 <a:cs typeface="Noto Sans SC" pitchFamily="34" charset="-120"/>
               </a:rPr>
-              <a:t>Teacher calls out duration phrases </a:t>
-            </a:r>
+              <a:t> (horizontal, vertical, or diagonal) = BINGO! Call out and read back the phrases.</a:t>
+            </a:r>
+            <a:endParaRPr lang="en-US" sz="1000" dirty="0"/>
+          </a:p>
+        </p:txBody>
+      </p:sp>
+      <p:sp>
+        <p:nvSpPr>
+          <p:cNvPr id="47" name="Text 45"/>
+          <p:cNvSpPr/>
+          <p:nvPr/>
+        </p:nvSpPr>
+        <p:spPr>
+          <a:xfrm>
+            <a:off x="4384328" y="2732931"/>
+            <a:ext cx="165164" cy="177701"/>
+          </a:xfrm>
+          <a:prstGeom prst="rect">
+            <a:avLst/>
+          </a:prstGeom>
+          <a:noFill/>
+          <a:ln/>
+        </p:spPr>
+        <p:txBody>
+          <a:bodyPr wrap="square" lIns="0" tIns="0" rIns="0" bIns="0" rtlCol="0" anchor="t"/>
+          <a:lstStyle/>
+          <a:p>
             <a:pPr algn="l" indent="0" marL="0">
               <a:lnSpc>
                 <a:spcPts val="1400"/>
@@ -4284,16 +4411,41 @@
               <a:buNone/>
             </a:pPr>
             <a:r>
-              <a:rPr lang="en-US" sz="1000" b="1" dirty="0">
-                <a:solidFill>
-                  <a:srgbClr val="1E2A38"/>
-                </a:solidFill>
-                <a:latin typeface="Noto Sans SC" pitchFamily="34" charset="0"/>
-                <a:ea typeface="Noto Sans SC" pitchFamily="34" charset="-122"/>
-                <a:cs typeface="Noto Sans SC" pitchFamily="34" charset="-120"/>
-              </a:rPr>
-              <a:t>in Chinese</a:t>
-            </a:r>
+              <a:rPr lang="en-US" sz="1000" dirty="0">
+                <a:solidFill>
+                  <a:srgbClr val="5B6677"/>
+                </a:solidFill>
+                <a:latin typeface="Noto Sans SC" pitchFamily="34" charset="0"/>
+                <a:ea typeface="Noto Sans SC" pitchFamily="34" charset="-122"/>
+                <a:cs typeface="Noto Sans SC" pitchFamily="34" charset="-120"/>
+              </a:rPr>
+              <a:t>🔄</a:t>
+            </a:r>
+            <a:endParaRPr lang="en-US" sz="1000" dirty="0"/>
+          </a:p>
+        </p:txBody>
+      </p:sp>
+      <p:sp>
+        <p:nvSpPr>
+          <p:cNvPr id="48" name="Text 46"/>
+          <p:cNvSpPr/>
+          <p:nvPr/>
+        </p:nvSpPr>
+        <p:spPr>
+          <a:xfrm>
+            <a:off x="4660553" y="2732931"/>
+            <a:ext cx="6061409" cy="177701"/>
+          </a:xfrm>
+          <a:prstGeom prst="rect">
+            <a:avLst/>
+          </a:prstGeom>
+          <a:noFill/>
+          <a:ln/>
+        </p:spPr>
+        <p:txBody>
+          <a:bodyPr wrap="square" lIns="0" tIns="0" rIns="0" bIns="0" rtlCol="0" anchor="t"/>
+          <a:lstStyle/>
+          <a:p>
             <a:pPr algn="l" indent="0" marL="0">
               <a:lnSpc>
                 <a:spcPts val="1400"/>
@@ -4309,81 +4461,8 @@
                 <a:ea typeface="Noto Sans SC" pitchFamily="34" charset="-122"/>
                 <a:cs typeface="Noto Sans SC" pitchFamily="34" charset="-120"/>
               </a:rPr>
-              <a:t> (e.g. 两个小时). Students find &amp; mark the English equivalent.</a:t>
-            </a:r>
-            <a:endParaRPr lang="en-US" sz="1000" dirty="0"/>
-          </a:p>
-        </p:txBody>
-      </p:sp>
-      <p:sp>
-        <p:nvSpPr>
-          <p:cNvPr id="45" name="Text 43"/>
-          <p:cNvSpPr/>
-          <p:nvPr/>
-        </p:nvSpPr>
-        <p:spPr>
-          <a:xfrm>
-            <a:off x="4384328" y="2466380"/>
-            <a:ext cx="165164" cy="177701"/>
-          </a:xfrm>
-          <a:prstGeom prst="rect">
-            <a:avLst/>
-          </a:prstGeom>
-          <a:noFill/>
-          <a:ln/>
-        </p:spPr>
-        <p:txBody>
-          <a:bodyPr wrap="square" lIns="0" tIns="0" rIns="0" bIns="0" rtlCol="0" anchor="t"/>
-          <a:lstStyle/>
-          <a:p>
-            <a:pPr algn="l" indent="0" marL="0">
-              <a:lnSpc>
-                <a:spcPts val="1400"/>
-              </a:lnSpc>
-              <a:buNone/>
-            </a:pPr>
-            <a:r>
-              <a:rPr lang="en-US" sz="1000" dirty="0">
-                <a:solidFill>
-                  <a:srgbClr val="5B6677"/>
-                </a:solidFill>
-                <a:latin typeface="Noto Sans SC" pitchFamily="34" charset="0"/>
-                <a:ea typeface="Noto Sans SC" pitchFamily="34" charset="-122"/>
-                <a:cs typeface="Noto Sans SC" pitchFamily="34" charset="-120"/>
-              </a:rPr>
-              <a:t>3️⃣</a:t>
-            </a:r>
-            <a:endParaRPr lang="en-US" sz="1000" dirty="0"/>
-          </a:p>
-        </p:txBody>
-      </p:sp>
-      <p:sp>
-        <p:nvSpPr>
-          <p:cNvPr id="46" name="Text 44"/>
-          <p:cNvSpPr/>
-          <p:nvPr/>
-        </p:nvSpPr>
-        <p:spPr>
-          <a:xfrm>
-            <a:off x="4660553" y="2466380"/>
-            <a:ext cx="5946797" cy="177701"/>
-          </a:xfrm>
-          <a:prstGeom prst="rect">
-            <a:avLst/>
-          </a:prstGeom>
-          <a:noFill/>
-          <a:ln/>
-        </p:spPr>
-        <p:txBody>
-          <a:bodyPr wrap="square" lIns="0" tIns="0" rIns="0" bIns="0" rtlCol="0" anchor="t"/>
-          <a:lstStyle/>
-          <a:p>
-            <a:pPr algn="l" indent="0" marL="0">
-              <a:lnSpc>
-                <a:spcPts val="1400"/>
-              </a:lnSpc>
-              <a:buNone/>
-            </a:pPr>
+              <a:t>Play 2–3 rounds. Sample card shown → each student's card has phrases in </a:t>
+            </a:r>
             <a:r>
               <a:rPr lang="en-US" sz="1000" b="1" dirty="0">
                 <a:solidFill>
@@ -4393,132 +4472,8 @@
                 <a:ea typeface="Noto Sans SC" pitchFamily="34" charset="-122"/>
                 <a:cs typeface="Noto Sans SC" pitchFamily="34" charset="-120"/>
               </a:rPr>
-              <a:t>Three in a row</a:t>
-            </a:r>
-            <a:pPr algn="l" indent="0" marL="0">
-              <a:lnSpc>
-                <a:spcPts val="1400"/>
-              </a:lnSpc>
-              <a:buNone/>
-            </a:pPr>
-            <a:r>
-              <a:rPr lang="en-US" sz="1000" dirty="0">
-                <a:solidFill>
-                  <a:srgbClr val="5B6677"/>
-                </a:solidFill>
-                <a:latin typeface="Noto Sans SC" pitchFamily="34" charset="0"/>
-                <a:ea typeface="Noto Sans SC" pitchFamily="34" charset="-122"/>
-                <a:cs typeface="Noto Sans SC" pitchFamily="34" charset="-120"/>
-              </a:rPr>
-              <a:t> (horizontal, vertical, or diagonal) = BINGO! Call out and read back the phrases.</a:t>
-            </a:r>
-            <a:endParaRPr lang="en-US" sz="1000" dirty="0"/>
-          </a:p>
-        </p:txBody>
-      </p:sp>
-      <p:sp>
-        <p:nvSpPr>
-          <p:cNvPr id="47" name="Text 45"/>
-          <p:cNvSpPr/>
-          <p:nvPr/>
-        </p:nvSpPr>
-        <p:spPr>
-          <a:xfrm>
-            <a:off x="4384328" y="2732931"/>
-            <a:ext cx="165164" cy="177701"/>
-          </a:xfrm>
-          <a:prstGeom prst="rect">
-            <a:avLst/>
-          </a:prstGeom>
-          <a:noFill/>
-          <a:ln/>
-        </p:spPr>
-        <p:txBody>
-          <a:bodyPr wrap="square" lIns="0" tIns="0" rIns="0" bIns="0" rtlCol="0" anchor="t"/>
-          <a:lstStyle/>
-          <a:p>
-            <a:pPr algn="l" indent="0" marL="0">
-              <a:lnSpc>
-                <a:spcPts val="1400"/>
-              </a:lnSpc>
-              <a:buNone/>
-            </a:pPr>
-            <a:r>
-              <a:rPr lang="en-US" sz="1000" dirty="0">
-                <a:solidFill>
-                  <a:srgbClr val="5B6677"/>
-                </a:solidFill>
-                <a:latin typeface="Noto Sans SC" pitchFamily="34" charset="0"/>
-                <a:ea typeface="Noto Sans SC" pitchFamily="34" charset="-122"/>
-                <a:cs typeface="Noto Sans SC" pitchFamily="34" charset="-120"/>
-              </a:rPr>
-              <a:t>🔄</a:t>
-            </a:r>
-            <a:endParaRPr lang="en-US" sz="1000" dirty="0"/>
-          </a:p>
-        </p:txBody>
-      </p:sp>
-      <p:sp>
-        <p:nvSpPr>
-          <p:cNvPr id="48" name="Text 46"/>
-          <p:cNvSpPr/>
-          <p:nvPr/>
-        </p:nvSpPr>
-        <p:spPr>
-          <a:xfrm>
-            <a:off x="4660553" y="2732931"/>
-            <a:ext cx="6061409" cy="177701"/>
-          </a:xfrm>
-          <a:prstGeom prst="rect">
-            <a:avLst/>
-          </a:prstGeom>
-          <a:noFill/>
-          <a:ln/>
-        </p:spPr>
-        <p:txBody>
-          <a:bodyPr wrap="square" lIns="0" tIns="0" rIns="0" bIns="0" rtlCol="0" anchor="t"/>
-          <a:lstStyle/>
-          <a:p>
-            <a:pPr algn="l" indent="0" marL="0">
-              <a:lnSpc>
-                <a:spcPts val="1400"/>
-              </a:lnSpc>
-              <a:buNone/>
-            </a:pPr>
-            <a:r>
-              <a:rPr lang="en-US" sz="1000" dirty="0">
-                <a:solidFill>
-                  <a:srgbClr val="5B6677"/>
-                </a:solidFill>
-                <a:latin typeface="Noto Sans SC" pitchFamily="34" charset="0"/>
-                <a:ea typeface="Noto Sans SC" pitchFamily="34" charset="-122"/>
-                <a:cs typeface="Noto Sans SC" pitchFamily="34" charset="-120"/>
-              </a:rPr>
-              <a:t>Play 2–3 rounds. Sample card shown → each student's card has phrases in </a:t>
-            </a:r>
-            <a:pPr algn="l" indent="0" marL="0">
-              <a:lnSpc>
-                <a:spcPts val="1400"/>
-              </a:lnSpc>
-              <a:buNone/>
-            </a:pPr>
-            <a:r>
-              <a:rPr lang="en-US" sz="1000" b="1" dirty="0">
-                <a:solidFill>
-                  <a:srgbClr val="1E2A38"/>
-                </a:solidFill>
-                <a:latin typeface="Noto Sans SC" pitchFamily="34" charset="0"/>
-                <a:ea typeface="Noto Sans SC" pitchFamily="34" charset="-122"/>
-                <a:cs typeface="Noto Sans SC" pitchFamily="34" charset="-120"/>
-              </a:rPr>
               <a:t>different positions</a:t>
             </a:r>
-            <a:pPr algn="l" indent="0" marL="0">
-              <a:lnSpc>
-                <a:spcPts val="1400"/>
-              </a:lnSpc>
-              <a:buNone/>
-            </a:pPr>
             <a:r>
               <a:rPr lang="en-US" sz="1000" dirty="0">
                 <a:solidFill>
@@ -5655,9 +5610,6 @@
               </a:rPr>
               <a:t>他每天打</a:t>
             </a:r>
-            <a:pPr algn="l" indent="0" marL="0">
-              <a:buNone/>
-            </a:pPr>
             <a:r>
               <a:rPr lang="en-US" sz="1200" b="1" i="1" dirty="0">
                 <a:solidFill>
@@ -5669,9 +5621,6 @@
               </a:rPr>
               <a:t>fill in</a:t>
             </a:r>
-            <a:pPr algn="l" indent="0" marL="0">
-              <a:buNone/>
-            </a:pPr>
             <a:r>
               <a:rPr lang="en-US" sz="1500" dirty="0">
                 <a:solidFill>
@@ -5725,12 +5674,6 @@
               </a:rPr>
               <a:t>Person </a:t>
             </a:r>
-            <a:pPr algn="l" indent="0" marL="0">
-              <a:spcBef>
-                <a:spcPts val="300"/>
-              </a:spcBef>
-              <a:buNone/>
-            </a:pPr>
             <a:r>
               <a:rPr lang="en-US" sz="800" b="1" dirty="0">
                 <a:solidFill>
@@ -5742,12 +5685,6 @@
               </a:rPr>
               <a:t>1</a:t>
             </a:r>
-            <a:pPr algn="l" indent="0" marL="0">
-              <a:spcBef>
-                <a:spcPts val="300"/>
-              </a:spcBef>
-              <a:buNone/>
-            </a:pPr>
             <a:r>
               <a:rPr lang="en-US" sz="800" dirty="0">
                 <a:solidFill>
@@ -5980,9 +5917,6 @@
               </a:rPr>
               <a:t>她每天唱</a:t>
             </a:r>
-            <a:pPr algn="l" indent="0" marL="0">
-              <a:buNone/>
-            </a:pPr>
             <a:r>
               <a:rPr lang="en-US" sz="1200" b="1" i="1" dirty="0">
                 <a:solidFill>
@@ -5994,9 +5928,6 @@
               </a:rPr>
               <a:t>fill in</a:t>
             </a:r>
-            <a:pPr algn="l" indent="0" marL="0">
-              <a:buNone/>
-            </a:pPr>
             <a:r>
               <a:rPr lang="en-US" sz="1500" dirty="0">
                 <a:solidFill>
@@ -6050,12 +5981,6 @@
               </a:rPr>
               <a:t>Person </a:t>
             </a:r>
-            <a:pPr algn="l" indent="0" marL="0">
-              <a:spcBef>
-                <a:spcPts val="300"/>
-              </a:spcBef>
-              <a:buNone/>
-            </a:pPr>
             <a:r>
               <a:rPr lang="en-US" sz="800" b="1" dirty="0">
                 <a:solidFill>
@@ -6067,12 +5992,6 @@
               </a:rPr>
               <a:t>2</a:t>
             </a:r>
-            <a:pPr algn="l" indent="0" marL="0">
-              <a:spcBef>
-                <a:spcPts val="300"/>
-              </a:spcBef>
-              <a:buNone/>
-            </a:pPr>
             <a:r>
               <a:rPr lang="en-US" sz="800" dirty="0">
                 <a:solidFill>
@@ -6305,9 +6224,6 @@
               </a:rPr>
               <a:t>我每天读</a:t>
             </a:r>
-            <a:pPr algn="l" indent="0" marL="0">
-              <a:buNone/>
-            </a:pPr>
             <a:r>
               <a:rPr lang="en-US" sz="1200" b="1" i="1" dirty="0">
                 <a:solidFill>
@@ -6319,9 +6235,6 @@
               </a:rPr>
               <a:t>fill in</a:t>
             </a:r>
-            <a:pPr algn="l" indent="0" marL="0">
-              <a:buNone/>
-            </a:pPr>
             <a:r>
               <a:rPr lang="en-US" sz="1500" dirty="0">
                 <a:solidFill>
@@ -6375,12 +6288,6 @@
               </a:rPr>
               <a:t>Person </a:t>
             </a:r>
-            <a:pPr algn="l" indent="0" marL="0">
-              <a:spcBef>
-                <a:spcPts val="300"/>
-              </a:spcBef>
-              <a:buNone/>
-            </a:pPr>
             <a:r>
               <a:rPr lang="en-US" sz="800" b="1" dirty="0">
                 <a:solidFill>
@@ -6392,12 +6299,6 @@
               </a:rPr>
               <a:t>3</a:t>
             </a:r>
-            <a:pPr algn="l" indent="0" marL="0">
-              <a:spcBef>
-                <a:spcPts val="300"/>
-              </a:spcBef>
-              <a:buNone/>
-            </a:pPr>
             <a:r>
               <a:rPr lang="en-US" sz="800" dirty="0">
                 <a:solidFill>
@@ -6630,9 +6531,6 @@
               </a:rPr>
               <a:t>他每天听</a:t>
             </a:r>
-            <a:pPr algn="l" indent="0" marL="0">
-              <a:buNone/>
-            </a:pPr>
             <a:r>
               <a:rPr lang="en-US" sz="1200" b="1" i="1" dirty="0">
                 <a:solidFill>
@@ -6644,9 +6542,6 @@
               </a:rPr>
               <a:t>fill in</a:t>
             </a:r>
-            <a:pPr algn="l" indent="0" marL="0">
-              <a:buNone/>
-            </a:pPr>
             <a:r>
               <a:rPr lang="en-US" sz="1500" dirty="0">
                 <a:solidFill>
@@ -6700,12 +6595,6 @@
               </a:rPr>
               <a:t>Person </a:t>
             </a:r>
-            <a:pPr algn="l" indent="0" marL="0">
-              <a:spcBef>
-                <a:spcPts val="300"/>
-              </a:spcBef>
-              <a:buNone/>
-            </a:pPr>
             <a:r>
               <a:rPr lang="en-US" sz="800" b="1" dirty="0">
                 <a:solidFill>
@@ -6717,12 +6606,6 @@
               </a:rPr>
               <a:t>4</a:t>
             </a:r>
-            <a:pPr algn="l" indent="0" marL="0">
-              <a:spcBef>
-                <a:spcPts val="300"/>
-              </a:spcBef>
-              <a:buNone/>
-            </a:pPr>
             <a:r>
               <a:rPr lang="en-US" sz="800" dirty="0">
                 <a:solidFill>
@@ -7139,12 +7022,6 @@
               </a:rPr>
               <a:t>Fastest correct team</a:t>
             </a:r>
-            <a:pPr algn="l" indent="0" marL="0">
-              <a:lnSpc>
-                <a:spcPts val="1350"/>
-              </a:lnSpc>
-              <a:buNone/>
-            </a:pPr>
             <a:r>
               <a:rPr lang="en-US" sz="1000" dirty="0">
                 <a:solidFill>
@@ -8403,9 +8280,6 @@
               </a:rPr>
               <a:t>SC 1 — I can say </a:t>
             </a:r>
-            <a:pPr algn="l" indent="0" marL="0">
-              <a:buNone/>
-            </a:pPr>
             <a:r>
               <a:rPr lang="en-US" sz="1100" b="1" dirty="0">
                 <a:solidFill>
@@ -8417,9 +8291,6 @@
               </a:rPr>
               <a:t>时间长度</a:t>
             </a:r>
-            <a:pPr algn="l" indent="0" marL="0">
-              <a:buNone/>
-            </a:pPr>
             <a:r>
               <a:rPr lang="en-US" sz="1100" dirty="0">
                 <a:solidFill>
@@ -8695,9 +8566,6 @@
               </a:rPr>
               <a:t>SC 2 — I can use </a:t>
             </a:r>
-            <a:pPr algn="l" indent="0" marL="0">
-              <a:buNone/>
-            </a:pPr>
             <a:r>
               <a:rPr lang="en-US" sz="1100" b="1" dirty="0">
                 <a:solidFill>
@@ -9234,15 +9102,6 @@
               <a:t>Write this sentence in Chinese on your mini whiteboard:
 </a:t>
             </a:r>
-            <a:pPr algn="l" indent="0" marL="0">
-              <a:lnSpc>
-                <a:spcPts val="1680"/>
-              </a:lnSpc>
-              <a:spcAft>
-                <a:spcPts val="800"/>
-              </a:spcAft>
-              <a:buNone/>
-            </a:pPr>
             <a:r>
               <a:rPr lang="en-US" sz="1200" i="1" dirty="0">
                 <a:solidFill>
@@ -9439,9 +9298,6 @@
               </a:rPr>
               <a:t>Timing: SC revisit </a:t>
             </a:r>
-            <a:pPr algn="l" indent="0" marL="0">
-              <a:buNone/>
-            </a:pPr>
             <a:r>
               <a:rPr lang="en-US" sz="1000" b="1" dirty="0">
                 <a:solidFill>
@@ -9453,9 +9309,6 @@
               </a:rPr>
               <a:t>43–46 min</a:t>
             </a:r>
-            <a:pPr algn="l" indent="0" marL="0">
-              <a:buNone/>
-            </a:pPr>
             <a:r>
               <a:rPr lang="en-US" sz="1000" dirty="0">
                 <a:solidFill>
@@ -9467,9 +9320,6 @@
               </a:rPr>
               <a:t> · Exit ticket </a:t>
             </a:r>
-            <a:pPr algn="l" indent="0" marL="0">
-              <a:buNone/>
-            </a:pPr>
             <a:r>
               <a:rPr lang="en-US" sz="1000" b="1" dirty="0">
                 <a:solidFill>
@@ -9481,9 +9331,6 @@
               </a:rPr>
               <a:t>46–50 min</a:t>
             </a:r>
-            <a:pPr algn="l" indent="0" marL="0">
-              <a:buNone/>
-            </a:pPr>
             <a:r>
               <a:rPr lang="en-US" sz="1000" dirty="0">
                 <a:solidFill>
@@ -9495,9 +9342,6 @@
               </a:rPr>
               <a:t> · Clean up &amp; leave by </a:t>
             </a:r>
-            <a:pPr algn="l" indent="0" marL="0">
-              <a:buNone/>
-            </a:pPr>
             <a:r>
               <a:rPr lang="en-US" sz="1000" b="1" dirty="0">
                 <a:solidFill>
@@ -10510,9 +10354,6 @@
               </a:rPr>
               <a:t>今天学得很好！</a:t>
             </a:r>
-            <a:pPr algn="ctr" indent="0" marL="0">
-              <a:buNone/>
-            </a:pPr>
             <a:r>
               <a:rPr lang="en-US" sz="1300" b="1" dirty="0">
                 <a:solidFill>
@@ -12021,9 +11862,6 @@
               </a:rPr>
               <a:t>Listen for time phrases! </a:t>
             </a:r>
-            <a:pPr algn="l" indent="0" marL="0">
-              <a:buNone/>
-            </a:pPr>
             <a:r>
               <a:rPr lang="en-US" sz="1000" b="1" dirty="0">
                 <a:solidFill>
@@ -12690,12 +12528,6 @@
               </a:rPr>
               <a:t>We are learning to say </a:t>
             </a:r>
-            <a:pPr algn="l" indent="0" marL="0">
-              <a:lnSpc>
-                <a:spcPts val="1890"/>
-              </a:lnSpc>
-              <a:buNone/>
-            </a:pPr>
             <a:r>
               <a:rPr lang="en-US" sz="1400" b="1" dirty="0">
                 <a:solidFill>
@@ -12707,12 +12539,6 @@
               </a:rPr>
               <a:t>how long</a:t>
             </a:r>
-            <a:pPr algn="l" indent="0" marL="0">
-              <a:lnSpc>
-                <a:spcPts val="1890"/>
-              </a:lnSpc>
-              <a:buNone/>
-            </a:pPr>
             <a:r>
               <a:rPr lang="en-US" sz="1400" dirty="0">
                 <a:solidFill>
@@ -12724,12 +12550,6 @@
               </a:rPr>
               <a:t> we do activities using the </a:t>
             </a:r>
-            <a:pPr algn="l" indent="0" marL="0">
-              <a:lnSpc>
-                <a:spcPts val="1890"/>
-              </a:lnSpc>
-              <a:buNone/>
-            </a:pPr>
             <a:r>
               <a:rPr lang="en-US" sz="1400" b="1" dirty="0">
                 <a:solidFill>
@@ -12741,12 +12561,6 @@
               </a:rPr>
               <a:t>duration structure</a:t>
             </a:r>
-            <a:pPr algn="l" indent="0" marL="0">
-              <a:lnSpc>
-                <a:spcPts val="1890"/>
-              </a:lnSpc>
-              <a:buNone/>
-            </a:pPr>
             <a:r>
               <a:rPr lang="en-US" sz="1400" dirty="0">
                 <a:solidFill>
@@ -12913,12 +12727,6 @@
               </a:rPr>
               <a:t>Say </a:t>
             </a:r>
-            <a:pPr algn="l" indent="0" marL="0">
-              <a:lnSpc>
-                <a:spcPts val="1820"/>
-              </a:lnSpc>
-              <a:buNone/>
-            </a:pPr>
             <a:r>
               <a:rPr lang="en-US" sz="1300" b="1" dirty="0">
                 <a:solidFill>
@@ -12930,12 +12738,6 @@
               </a:rPr>
               <a:t>time duration phrases</a:t>
             </a:r>
-            <a:pPr algn="l" indent="0" marL="0">
-              <a:lnSpc>
-                <a:spcPts val="1820"/>
-              </a:lnSpc>
-              <a:buNone/>
-            </a:pPr>
             <a:r>
               <a:rPr lang="en-US" sz="1300" dirty="0">
                 <a:solidFill>
@@ -12947,12 +12749,6 @@
               </a:rPr>
               <a:t> in Chinese — </a:t>
             </a:r>
-            <a:pPr algn="l" indent="0" marL="0">
-              <a:lnSpc>
-                <a:spcPts val="1820"/>
-              </a:lnSpc>
-              <a:buNone/>
-            </a:pPr>
             <a:r>
               <a:rPr lang="en-US" sz="1300" dirty="0">
                 <a:solidFill>
@@ -13077,12 +12873,6 @@
               </a:rPr>
               <a:t>Use the </a:t>
             </a:r>
-            <a:pPr algn="l" indent="0" marL="0">
-              <a:lnSpc>
-                <a:spcPts val="1820"/>
-              </a:lnSpc>
-              <a:buNone/>
-            </a:pPr>
             <a:r>
               <a:rPr lang="en-US" sz="1300" b="1" dirty="0">
                 <a:solidFill>
@@ -13094,12 +12884,6 @@
               </a:rPr>
               <a:t>duration structure</a:t>
             </a:r>
-            <a:pPr algn="l" indent="0" marL="0">
-              <a:lnSpc>
-                <a:spcPts val="1820"/>
-              </a:lnSpc>
-              <a:buNone/>
-            </a:pPr>
             <a:r>
               <a:rPr lang="en-US" sz="1300" dirty="0">
                 <a:solidFill>
@@ -13111,12 +12895,6 @@
               </a:rPr>
               <a:t>: </a:t>
             </a:r>
-            <a:pPr algn="l" indent="0" marL="0">
-              <a:lnSpc>
-                <a:spcPts val="1820"/>
-              </a:lnSpc>
-              <a:buNone/>
-            </a:pPr>
             <a:r>
               <a:rPr lang="en-US" sz="1300" dirty="0">
                 <a:solidFill>
@@ -13128,12 +12906,6 @@
               </a:rPr>
               <a:t>每天 + verb + duration + 的 + noun</a:t>
             </a:r>
-            <a:pPr algn="l" indent="0" marL="0">
-              <a:lnSpc>
-                <a:spcPts val="1820"/>
-              </a:lnSpc>
-              <a:buNone/>
-            </a:pPr>
             <a:r>
               <a:rPr lang="en-US" sz="1300" dirty="0">
                 <a:solidFill>
@@ -13145,12 +12917,6 @@
               </a:rPr>
               <a:t> </a:t>
             </a:r>
-            <a:pPr algn="l" indent="0" marL="0">
-              <a:lnSpc>
-                <a:spcPts val="1820"/>
-              </a:lnSpc>
-              <a:buNone/>
-            </a:pPr>
             <a:r>
               <a:rPr lang="en-US" sz="1100" i="1" dirty="0">
                 <a:solidFill>
@@ -13275,12 +13041,6 @@
               </a:rPr>
               <a:t>Describe </a:t>
             </a:r>
-            <a:pPr algn="l" indent="0" marL="0">
-              <a:lnSpc>
-                <a:spcPts val="1820"/>
-              </a:lnSpc>
-              <a:buNone/>
-            </a:pPr>
             <a:r>
               <a:rPr lang="en-US" sz="1300" b="1" dirty="0">
                 <a:solidFill>
@@ -13292,12 +13052,6 @@
               </a:rPr>
               <a:t>how long</a:t>
             </a:r>
-            <a:pPr algn="l" indent="0" marL="0">
-              <a:lnSpc>
-                <a:spcPts val="1820"/>
-              </a:lnSpc>
-              <a:buNone/>
-            </a:pPr>
             <a:r>
               <a:rPr lang="en-US" sz="1300" dirty="0">
                 <a:solidFill>
@@ -15462,12 +15216,6 @@
               </a:rPr>
               <a:t>Compound time pattern: hours first, then </a:t>
             </a:r>
-            <a:pPr algn="l" indent="0" marL="0">
-              <a:lnSpc>
-                <a:spcPts val="1350"/>
-              </a:lnSpc>
-              <a:buNone/>
-            </a:pPr>
             <a:r>
               <a:rPr lang="en-US" sz="1000" b="1" dirty="0">
                 <a:solidFill>
@@ -15479,12 +15227,6 @@
               </a:rPr>
               <a:t>零</a:t>
             </a:r>
-            <a:pPr algn="l" indent="0" marL="0">
-              <a:lnSpc>
-                <a:spcPts val="1350"/>
-              </a:lnSpc>
-              <a:buNone/>
-            </a:pPr>
             <a:r>
               <a:rPr lang="en-US" sz="1000" dirty="0">
                 <a:solidFill>
@@ -16941,9 +16683,6 @@
               </a:rPr>
               <a:t>他</a:t>
             </a:r>
-            <a:pPr algn="l" indent="0" marL="0">
-              <a:buNone/>
-            </a:pPr>
             <a:r>
               <a:rPr lang="en-US" sz="1500" b="1" dirty="0">
                 <a:solidFill>
@@ -16955,9 +16694,6 @@
               </a:rPr>
               <a:t>每天</a:t>
             </a:r>
-            <a:pPr algn="l" indent="0" marL="0">
-              <a:buNone/>
-            </a:pPr>
             <a:r>
               <a:rPr lang="en-US" sz="1500" b="1" dirty="0">
                 <a:solidFill>
@@ -16969,9 +16705,6 @@
               </a:rPr>
               <a:t>弹</a:t>
             </a:r>
-            <a:pPr algn="l" indent="0" marL="0">
-              <a:buNone/>
-            </a:pPr>
             <a:r>
               <a:rPr lang="en-US" sz="1500" b="1" dirty="0">
                 <a:solidFill>
@@ -16983,9 +16716,6 @@
               </a:rPr>
               <a:t>一个小时</a:t>
             </a:r>
-            <a:pPr algn="l" indent="0" marL="0">
-              <a:buNone/>
-            </a:pPr>
             <a:r>
               <a:rPr lang="en-US" sz="1500" b="1" dirty="0">
                 <a:solidFill>
@@ -16997,9 +16727,6 @@
               </a:rPr>
               <a:t>的</a:t>
             </a:r>
-            <a:pPr algn="l" indent="0" marL="0">
-              <a:buNone/>
-            </a:pPr>
             <a:r>
               <a:rPr lang="en-US" sz="1500" b="1" dirty="0">
                 <a:solidFill>
@@ -17011,9 +16738,6 @@
               </a:rPr>
               <a:t>钢琴</a:t>
             </a:r>
-            <a:pPr algn="l" indent="0" marL="0">
-              <a:buNone/>
-            </a:pPr>
             <a:r>
               <a:rPr lang="en-US" sz="1500" dirty="0">
                 <a:solidFill>
@@ -17139,9 +16863,6 @@
               </a:rPr>
               <a:t>她</a:t>
             </a:r>
-            <a:pPr algn="l" indent="0" marL="0">
-              <a:buNone/>
-            </a:pPr>
             <a:r>
               <a:rPr lang="en-US" sz="1500" b="1" dirty="0">
                 <a:solidFill>
@@ -17153,9 +16874,6 @@
               </a:rPr>
               <a:t>每天</a:t>
             </a:r>
-            <a:pPr algn="l" indent="0" marL="0">
-              <a:buNone/>
-            </a:pPr>
             <a:r>
               <a:rPr lang="en-US" sz="1500" b="1" dirty="0">
                 <a:solidFill>
@@ -17167,9 +16885,6 @@
               </a:rPr>
               <a:t>唱</a:t>
             </a:r>
-            <a:pPr algn="l" indent="0" marL="0">
-              <a:buNone/>
-            </a:pPr>
             <a:r>
               <a:rPr lang="en-US" sz="1500" b="1" dirty="0">
                 <a:solidFill>
@@ -17181,9 +16896,6 @@
               </a:rPr>
               <a:t>半个小时</a:t>
             </a:r>
-            <a:pPr algn="l" indent="0" marL="0">
-              <a:buNone/>
-            </a:pPr>
             <a:r>
               <a:rPr lang="en-US" sz="1500" b="1" dirty="0">
                 <a:solidFill>
@@ -17195,9 +16907,6 @@
               </a:rPr>
               <a:t>的</a:t>
             </a:r>
-            <a:pPr algn="l" indent="0" marL="0">
-              <a:buNone/>
-            </a:pPr>
             <a:r>
               <a:rPr lang="en-US" sz="1500" b="1" dirty="0">
                 <a:solidFill>
@@ -17209,9 +16918,6 @@
               </a:rPr>
               <a:t>歌</a:t>
             </a:r>
-            <a:pPr algn="l" indent="0" marL="0">
-              <a:buNone/>
-            </a:pPr>
             <a:r>
               <a:rPr lang="en-US" sz="1500" dirty="0">
                 <a:solidFill>
@@ -17337,9 +17043,6 @@
               </a:rPr>
               <a:t>我</a:t>
             </a:r>
-            <a:pPr algn="l" indent="0" marL="0">
-              <a:buNone/>
-            </a:pPr>
             <a:r>
               <a:rPr lang="en-US" sz="1500" b="1" dirty="0">
                 <a:solidFill>
@@ -17351,9 +17054,6 @@
               </a:rPr>
               <a:t>每天</a:t>
             </a:r>
-            <a:pPr algn="l" indent="0" marL="0">
-              <a:buNone/>
-            </a:pPr>
             <a:r>
               <a:rPr lang="en-US" sz="1500" b="1" dirty="0">
                 <a:solidFill>
@@ -17365,9 +17065,6 @@
               </a:rPr>
               <a:t>看</a:t>
             </a:r>
-            <a:pPr algn="l" indent="0" marL="0">
-              <a:buNone/>
-            </a:pPr>
             <a:r>
               <a:rPr lang="en-US" sz="1500" b="1" dirty="0">
                 <a:solidFill>
@@ -17379,9 +17076,6 @@
               </a:rPr>
               <a:t>两个小时</a:t>
             </a:r>
-            <a:pPr algn="l" indent="0" marL="0">
-              <a:buNone/>
-            </a:pPr>
             <a:r>
               <a:rPr lang="en-US" sz="1500" b="1" dirty="0">
                 <a:solidFill>
@@ -17393,9 +17087,6 @@
               </a:rPr>
               <a:t>的</a:t>
             </a:r>
-            <a:pPr algn="l" indent="0" marL="0">
-              <a:buNone/>
-            </a:pPr>
             <a:r>
               <a:rPr lang="en-US" sz="1500" b="1" dirty="0">
                 <a:solidFill>
@@ -17407,9 +17098,6 @@
               </a:rPr>
               <a:t>电视</a:t>
             </a:r>
-            <a:pPr algn="l" indent="0" marL="0">
-              <a:buNone/>
-            </a:pPr>
             <a:r>
               <a:rPr lang="en-US" sz="1500" dirty="0">
                 <a:solidFill>
@@ -17655,9 +17343,6 @@
               </a:rPr>
               <a:t>他每天弹</a:t>
             </a:r>
-            <a:pPr algn="l" indent="0" marL="0">
-              <a:buNone/>
-            </a:pPr>
             <a:r>
               <a:rPr lang="en-US" sz="1300" b="1" dirty="0">
                 <a:solidFill>
@@ -17669,9 +17354,6 @@
               </a:rPr>
               <a:t>一个小时</a:t>
             </a:r>
-            <a:pPr algn="l" indent="0" marL="0">
-              <a:buNone/>
-            </a:pPr>
             <a:r>
               <a:rPr lang="en-US" sz="1300" dirty="0">
                 <a:solidFill>
@@ -18527,15 +18209,6 @@
               </a:rPr>
               <a:t>What's wrong with this sentence? </a:t>
             </a:r>
-            <a:pPr algn="l" indent="0" marL="0">
-              <a:lnSpc>
-                <a:spcPts val="1820"/>
-              </a:lnSpc>
-              <a:spcAft>
-                <a:spcPts val="800"/>
-              </a:spcAft>
-              <a:buNone/>
-            </a:pPr>
             <a:r>
               <a:rPr lang="en-US" sz="1300" b="1" dirty="0">
                 <a:solidFill>
@@ -18858,15 +18531,6 @@
               </a:rPr>
               <a:t>How do you say </a:t>
             </a:r>
-            <a:pPr algn="l" indent="0" marL="0">
-              <a:lnSpc>
-                <a:spcPts val="1820"/>
-              </a:lnSpc>
-              <a:spcAft>
-                <a:spcPts val="800"/>
-              </a:spcAft>
-              <a:buNone/>
-            </a:pPr>
             <a:r>
               <a:rPr lang="en-US" sz="1300" b="1" i="1" dirty="0">
                 <a:solidFill>
@@ -18878,15 +18542,6 @@
               </a:rPr>
               <a:t>"one and a half hours"</a:t>
             </a:r>
-            <a:pPr algn="l" indent="0" marL="0">
-              <a:lnSpc>
-                <a:spcPts val="1820"/>
-              </a:lnSpc>
-              <a:spcAft>
-                <a:spcPts val="800"/>
-              </a:spcAft>
-              <a:buNone/>
-            </a:pPr>
             <a:r>
               <a:rPr lang="en-US" sz="1300" dirty="0">
                 <a:solidFill>
@@ -19578,9 +19233,6 @@
               </a:rPr>
               <a:t>她每天读</a:t>
             </a:r>
-            <a:pPr algn="l" indent="0" marL="0">
-              <a:buNone/>
-            </a:pPr>
             <a:r>
               <a:rPr lang="en-US" sz="1600" b="1" dirty="0">
                 <a:solidFill>
@@ -19592,9 +19244,6 @@
               </a:rPr>
               <a:t>三刻钟</a:t>
             </a:r>
-            <a:pPr algn="l" indent="0" marL="0">
-              <a:buNone/>
-            </a:pPr>
             <a:r>
               <a:rPr lang="en-US" sz="1600" dirty="0">
                 <a:solidFill>
@@ -19911,9 +19560,6 @@
               </a:rPr>
               <a:t>他每天弹</a:t>
             </a:r>
-            <a:pPr algn="l" indent="0" marL="0">
-              <a:buNone/>
-            </a:pPr>
             <a:r>
               <a:rPr lang="en-US" sz="1400" b="1" dirty="0">
                 <a:solidFill>
@@ -19925,9 +19571,6 @@
               </a:rPr>
               <a:t>一个小时</a:t>
             </a:r>
-            <a:pPr algn="l" indent="0" marL="0">
-              <a:buNone/>
-            </a:pPr>
             <a:r>
               <a:rPr lang="en-US" sz="1400" dirty="0">
                 <a:solidFill>
@@ -20014,9 +19657,6 @@
               </a:rPr>
               <a:t>Duration goes </a:t>
             </a:r>
-            <a:pPr algn="l" indent="0" marL="0">
-              <a:buNone/>
-            </a:pPr>
             <a:r>
               <a:rPr lang="en-US" sz="1300" b="1" dirty="0">
                 <a:solidFill>
@@ -20028,9 +19668,6 @@
               </a:rPr>
               <a:t>between verb and object</a:t>
             </a:r>
-            <a:pPr algn="l" indent="0" marL="0">
-              <a:buNone/>
-            </a:pPr>
             <a:r>
               <a:rPr lang="en-US" sz="1300" dirty="0">
                 <a:solidFill>
@@ -22067,12 +21704,6 @@
               </a:rPr>
               <a:t>Round 1 — Choral:</a:t>
             </a:r>
-            <a:pPr algn="l" indent="0" marL="0">
-              <a:lnSpc>
-                <a:spcPts val="1400"/>
-              </a:lnSpc>
-              <a:buNone/>
-            </a:pPr>
             <a:r>
               <a:rPr lang="en-US" sz="1000" dirty="0">
                 <a:solidFill>
@@ -22162,12 +21793,6 @@
               </a:rPr>
               <a:t>Round 2 — English→Chinese:</a:t>
             </a:r>
-            <a:pPr algn="l" indent="0" marL="0">
-              <a:lnSpc>
-                <a:spcPts val="1400"/>
-              </a:lnSpc>
-              <a:buNone/>
-            </a:pPr>
             <a:r>
               <a:rPr lang="en-US" sz="1000" dirty="0">
                 <a:solidFill>
@@ -22257,12 +21882,6 @@
               </a:rPr>
               <a:t>Round 3 — Rapid Fire Whiteboard:</a:t>
             </a:r>
-            <a:pPr algn="l" indent="0" marL="0">
-              <a:lnSpc>
-                <a:spcPts val="1400"/>
-              </a:lnSpc>
-              <a:buNone/>
-            </a:pPr>
             <a:r>
               <a:rPr lang="en-US" sz="1000" dirty="0">
                 <a:solidFill>
@@ -24953,9 +24572,6 @@
               </a:rPr>
               <a:t>每天</a:t>
             </a:r>
-            <a:pPr algn="l" indent="0" marL="0">
-              <a:buNone/>
-            </a:pPr>
             <a:r>
               <a:rPr lang="en-US" sz="1700" dirty="0">
                 <a:solidFill>
@@ -24967,9 +24583,6 @@
               </a:rPr>
               <a:t>的</a:t>
             </a:r>
-            <a:pPr algn="l" indent="0" marL="0">
-              <a:buNone/>
-            </a:pPr>
             <a:r>
               <a:rPr lang="en-US" sz="1700" dirty="0">
                 <a:solidFill>
